--- a/Stator_Trk_Monitoring/icon.pptx
+++ b/Stator_Trk_Monitoring/icon.pptx
@@ -127,12 +127,12 @@
   <pc:docChgLst>
     <pc:chgData name="Heo, JaeBin" userId="ed0301eb-46df-4c79-9b79-7e87ffe9b103" providerId="ADAL" clId="{5528FEEF-D1DC-4188-B0AA-883E55D1B0F9}"/>
     <pc:docChg chg="undo custSel addSld modSld">
-      <pc:chgData name="Heo, JaeBin" userId="ed0301eb-46df-4c79-9b79-7e87ffe9b103" providerId="ADAL" clId="{5528FEEF-D1DC-4188-B0AA-883E55D1B0F9}" dt="2026-03-27T04:58:03.174" v="307" actId="1076"/>
+      <pc:chgData name="Heo, JaeBin" userId="ed0301eb-46df-4c79-9b79-7e87ffe9b103" providerId="ADAL" clId="{5528FEEF-D1DC-4188-B0AA-883E55D1B0F9}" dt="2026-04-08T07:28:07.778" v="309" actId="478"/>
       <pc:docMkLst>
         <pc:docMk/>
       </pc:docMkLst>
       <pc:sldChg chg="addSp delSp modSp mod">
-        <pc:chgData name="Heo, JaeBin" userId="ed0301eb-46df-4c79-9b79-7e87ffe9b103" providerId="ADAL" clId="{5528FEEF-D1DC-4188-B0AA-883E55D1B0F9}" dt="2026-03-27T04:50:23.540" v="297" actId="1076"/>
+        <pc:chgData name="Heo, JaeBin" userId="ed0301eb-46df-4c79-9b79-7e87ffe9b103" providerId="ADAL" clId="{5528FEEF-D1DC-4188-B0AA-883E55D1B0F9}" dt="2026-04-08T07:28:07.778" v="309" actId="478"/>
         <pc:sldMkLst>
           <pc:docMk/>
           <pc:sldMk cId="3460216673" sldId="256"/>
@@ -145,22 +145,6 @@
             <ac:spMk id="8" creationId="{A29A2260-D515-C6F2-C94B-A6474D17FAF9}"/>
           </ac:spMkLst>
         </pc:spChg>
-        <pc:grpChg chg="add del mod">
-          <ac:chgData name="Heo, JaeBin" userId="ed0301eb-46df-4c79-9b79-7e87ffe9b103" providerId="ADAL" clId="{5528FEEF-D1DC-4188-B0AA-883E55D1B0F9}" dt="2026-03-27T04:21:35.567" v="181" actId="478"/>
-          <ac:grpSpMkLst>
-            <pc:docMk/>
-            <pc:sldMk cId="3460216673" sldId="256"/>
-            <ac:grpSpMk id="2" creationId="{C6B8DF92-40C4-A0A6-157B-7D19911C95FD}"/>
-          </ac:grpSpMkLst>
-        </pc:grpChg>
-        <pc:grpChg chg="add del mod">
-          <ac:chgData name="Heo, JaeBin" userId="ed0301eb-46df-4c79-9b79-7e87ffe9b103" providerId="ADAL" clId="{5528FEEF-D1DC-4188-B0AA-883E55D1B0F9}" dt="2026-03-27T04:19:40.329" v="132" actId="21"/>
-          <ac:grpSpMkLst>
-            <pc:docMk/>
-            <pc:sldMk cId="3460216673" sldId="256"/>
-            <ac:grpSpMk id="3" creationId="{CAEAC676-1C43-2B35-49AE-218F27DECF89}"/>
-          </ac:grpSpMkLst>
-        </pc:grpChg>
         <pc:grpChg chg="mod">
           <ac:chgData name="Heo, JaeBin" userId="ed0301eb-46df-4c79-9b79-7e87ffe9b103" providerId="ADAL" clId="{5528FEEF-D1DC-4188-B0AA-883E55D1B0F9}" dt="2026-03-27T04:22:06.084" v="189"/>
           <ac:grpSpMkLst>
@@ -178,23 +162,7 @@
           </ac:grpSpMkLst>
         </pc:grpChg>
         <pc:picChg chg="add del mod">
-          <ac:chgData name="Heo, JaeBin" userId="ed0301eb-46df-4c79-9b79-7e87ffe9b103" providerId="ADAL" clId="{5528FEEF-D1DC-4188-B0AA-883E55D1B0F9}" dt="2026-03-27T04:49:43.960" v="286" actId="478"/>
-          <ac:picMkLst>
-            <pc:docMk/>
-            <pc:sldMk cId="3460216673" sldId="256"/>
-            <ac:picMk id="2" creationId="{96A24064-2FBB-E159-D074-55121EE43384}"/>
-          </ac:picMkLst>
-        </pc:picChg>
-        <pc:picChg chg="add">
-          <ac:chgData name="Heo, JaeBin" userId="ed0301eb-46df-4c79-9b79-7e87ffe9b103" providerId="ADAL" clId="{5528FEEF-D1DC-4188-B0AA-883E55D1B0F9}" dt="2026-03-27T04:28:43.144" v="280"/>
-          <ac:picMkLst>
-            <pc:docMk/>
-            <pc:sldMk cId="3460216673" sldId="256"/>
-            <ac:picMk id="2" creationId="{A116F4E1-DE5D-8778-11DB-1FF9A7627F96}"/>
-          </ac:picMkLst>
-        </pc:picChg>
-        <pc:picChg chg="add mod">
-          <ac:chgData name="Heo, JaeBin" userId="ed0301eb-46df-4c79-9b79-7e87ffe9b103" providerId="ADAL" clId="{5528FEEF-D1DC-4188-B0AA-883E55D1B0F9}" dt="2026-03-27T04:50:23.540" v="297" actId="1076"/>
+          <ac:chgData name="Heo, JaeBin" userId="ed0301eb-46df-4c79-9b79-7e87ffe9b103" providerId="ADAL" clId="{5528FEEF-D1DC-4188-B0AA-883E55D1B0F9}" dt="2026-04-08T07:28:07.778" v="309" actId="478"/>
           <ac:picMkLst>
             <pc:docMk/>
             <pc:sldMk cId="3460216673" sldId="256"/>
@@ -209,46 +177,6 @@
             <ac:picMk id="9" creationId="{385A75E6-0B22-5091-353E-7215D280C003}"/>
           </ac:picMkLst>
         </pc:picChg>
-        <pc:picChg chg="add del">
-          <ac:chgData name="Heo, JaeBin" userId="ed0301eb-46df-4c79-9b79-7e87ffe9b103" providerId="ADAL" clId="{5528FEEF-D1DC-4188-B0AA-883E55D1B0F9}" dt="2026-03-27T04:49:38.540" v="282" actId="478"/>
-          <ac:picMkLst>
-            <pc:docMk/>
-            <pc:sldMk cId="3460216673" sldId="256"/>
-            <ac:picMk id="14" creationId="{CB1D08AA-43E6-7745-6121-C379FD2E60F3}"/>
-          </ac:picMkLst>
-        </pc:picChg>
-        <pc:cxnChg chg="mod">
-          <ac:chgData name="Heo, JaeBin" userId="ed0301eb-46df-4c79-9b79-7e87ffe9b103" providerId="ADAL" clId="{5528FEEF-D1DC-4188-B0AA-883E55D1B0F9}" dt="2026-03-27T04:19:39.424" v="131"/>
-          <ac:cxnSpMkLst>
-            <pc:docMk/>
-            <pc:sldMk cId="3460216673" sldId="256"/>
-            <ac:cxnSpMk id="5" creationId="{8BB5493B-C436-2558-249D-A4B13904EB81}"/>
-          </ac:cxnSpMkLst>
-        </pc:cxnChg>
-        <pc:cxnChg chg="mod">
-          <ac:chgData name="Heo, JaeBin" userId="ed0301eb-46df-4c79-9b79-7e87ffe9b103" providerId="ADAL" clId="{5528FEEF-D1DC-4188-B0AA-883E55D1B0F9}" dt="2026-03-27T04:19:39.424" v="131"/>
-          <ac:cxnSpMkLst>
-            <pc:docMk/>
-            <pc:sldMk cId="3460216673" sldId="256"/>
-            <ac:cxnSpMk id="6" creationId="{B2C81A1F-DDD5-A896-9CB4-2C7C55B700EC}"/>
-          </ac:cxnSpMkLst>
-        </pc:cxnChg>
-        <pc:cxnChg chg="mod">
-          <ac:chgData name="Heo, JaeBin" userId="ed0301eb-46df-4c79-9b79-7e87ffe9b103" providerId="ADAL" clId="{5528FEEF-D1DC-4188-B0AA-883E55D1B0F9}" dt="2026-03-27T04:19:38.644" v="130" actId="164"/>
-          <ac:cxnSpMkLst>
-            <pc:docMk/>
-            <pc:sldMk cId="3460216673" sldId="256"/>
-            <ac:cxnSpMk id="10" creationId="{8B06E142-6FA4-A393-F46A-D4579D40BCED}"/>
-          </ac:cxnSpMkLst>
-        </pc:cxnChg>
-        <pc:cxnChg chg="mod">
-          <ac:chgData name="Heo, JaeBin" userId="ed0301eb-46df-4c79-9b79-7e87ffe9b103" providerId="ADAL" clId="{5528FEEF-D1DC-4188-B0AA-883E55D1B0F9}" dt="2026-03-27T04:19:38.644" v="130" actId="164"/>
-          <ac:cxnSpMkLst>
-            <pc:docMk/>
-            <pc:sldMk cId="3460216673" sldId="256"/>
-            <ac:cxnSpMk id="11" creationId="{A60E590B-B6E0-0E7A-01A3-B5D372AEE1E7}"/>
-          </ac:cxnSpMkLst>
-        </pc:cxnChg>
         <pc:cxnChg chg="add mod">
           <ac:chgData name="Heo, JaeBin" userId="ed0301eb-46df-4c79-9b79-7e87ffe9b103" providerId="ADAL" clId="{5528FEEF-D1DC-4188-B0AA-883E55D1B0F9}" dt="2026-03-27T04:21:55.142" v="185" actId="693"/>
           <ac:cxnSpMkLst>
@@ -328,28 +256,12 @@
             <ac:spMk id="11" creationId="{5643F242-A41A-F1CF-DA8E-0FA1DB4BCDC0}"/>
           </ac:spMkLst>
         </pc:spChg>
-        <pc:grpChg chg="add del mod">
-          <ac:chgData name="Heo, JaeBin" userId="ed0301eb-46df-4c79-9b79-7e87ffe9b103" providerId="ADAL" clId="{5528FEEF-D1DC-4188-B0AA-883E55D1B0F9}" dt="2026-03-27T04:18:06.396" v="71" actId="165"/>
-          <ac:grpSpMkLst>
-            <pc:docMk/>
-            <pc:sldMk cId="4041900156" sldId="257"/>
-            <ac:grpSpMk id="8" creationId="{0DC68772-E803-8E6F-B367-CCD7E48FD806}"/>
-          </ac:grpSpMkLst>
-        </pc:grpChg>
         <pc:grpChg chg="add mod">
           <ac:chgData name="Heo, JaeBin" userId="ed0301eb-46df-4c79-9b79-7e87ffe9b103" providerId="ADAL" clId="{5528FEEF-D1DC-4188-B0AA-883E55D1B0F9}" dt="2026-03-27T04:20:14.094" v="142" actId="164"/>
           <ac:grpSpMkLst>
             <pc:docMk/>
             <pc:sldMk cId="4041900156" sldId="257"/>
             <ac:grpSpMk id="12" creationId="{FCB6AF46-A3FB-E92F-6165-C5A0402EB3AA}"/>
-          </ac:grpSpMkLst>
-        </pc:grpChg>
-        <pc:grpChg chg="add del mod">
-          <ac:chgData name="Heo, JaeBin" userId="ed0301eb-46df-4c79-9b79-7e87ffe9b103" providerId="ADAL" clId="{5528FEEF-D1DC-4188-B0AA-883E55D1B0F9}" dt="2026-03-27T04:19:05.410" v="104" actId="165"/>
-          <ac:grpSpMkLst>
-            <pc:docMk/>
-            <pc:sldMk cId="4041900156" sldId="257"/>
-            <ac:grpSpMk id="13" creationId="{F8203683-96DB-DA71-0201-BE2AAA2B15F7}"/>
           </ac:grpSpMkLst>
         </pc:grpChg>
         <pc:grpChg chg="add mod topLvl">
@@ -374,30 +286,6 @@
             <pc:docMk/>
             <pc:sldMk cId="4041900156" sldId="257"/>
             <ac:grpSpMk id="20" creationId="{FCC64C6E-1A06-E18B-7A3C-951A01E14A85}"/>
-          </ac:grpSpMkLst>
-        </pc:grpChg>
-        <pc:grpChg chg="add del mod">
-          <ac:chgData name="Heo, JaeBin" userId="ed0301eb-46df-4c79-9b79-7e87ffe9b103" providerId="ADAL" clId="{5528FEEF-D1DC-4188-B0AA-883E55D1B0F9}" dt="2026-03-27T04:20:38.217" v="162" actId="165"/>
-          <ac:grpSpMkLst>
-            <pc:docMk/>
-            <pc:sldMk cId="4041900156" sldId="257"/>
-            <ac:grpSpMk id="21" creationId="{C5AEBE5E-C362-0F57-D4A0-1DB04A7C8D4B}"/>
-          </ac:grpSpMkLst>
-        </pc:grpChg>
-        <pc:grpChg chg="add mod">
-          <ac:chgData name="Heo, JaeBin" userId="ed0301eb-46df-4c79-9b79-7e87ffe9b103" providerId="ADAL" clId="{5528FEEF-D1DC-4188-B0AA-883E55D1B0F9}" dt="2026-03-27T04:22:04.290" v="187" actId="164"/>
-          <ac:grpSpMkLst>
-            <pc:docMk/>
-            <pc:sldMk cId="4041900156" sldId="257"/>
-            <ac:grpSpMk id="26" creationId="{1617CC3E-0871-27BD-C838-F0E74C5B1104}"/>
-          </ac:grpSpMkLst>
-        </pc:grpChg>
-        <pc:grpChg chg="add del mod">
-          <ac:chgData name="Heo, JaeBin" userId="ed0301eb-46df-4c79-9b79-7e87ffe9b103" providerId="ADAL" clId="{5528FEEF-D1DC-4188-B0AA-883E55D1B0F9}" dt="2026-03-27T04:22:04.757" v="188" actId="21"/>
-          <ac:grpSpMkLst>
-            <pc:docMk/>
-            <pc:sldMk cId="4041900156" sldId="257"/>
-            <ac:grpSpMk id="30" creationId="{42CC1FC4-A160-C266-13C3-7EC66488AD32}"/>
           </ac:grpSpMkLst>
         </pc:grpChg>
         <pc:picChg chg="add mod">
@@ -430,14 +318,6 @@
             <pc:docMk/>
             <pc:sldMk cId="4041900156" sldId="257"/>
             <ac:picMk id="6" creationId="{B5373B0A-3422-8C1D-855E-545DAD7AD9AF}"/>
-          </ac:picMkLst>
-        </pc:picChg>
-        <pc:picChg chg="add del">
-          <ac:chgData name="Heo, JaeBin" userId="ed0301eb-46df-4c79-9b79-7e87ffe9b103" providerId="ADAL" clId="{5528FEEF-D1DC-4188-B0AA-883E55D1B0F9}" dt="2026-03-27T04:27:19.377" v="279" actId="478"/>
-          <ac:picMkLst>
-            <pc:docMk/>
-            <pc:sldMk cId="4041900156" sldId="257"/>
-            <ac:picMk id="31" creationId="{4088CE7A-D02E-0394-B4E1-3F6131657EEB}"/>
           </ac:picMkLst>
         </pc:picChg>
         <pc:cxnChg chg="mod">
@@ -480,30 +360,6 @@
             <ac:cxnSpMk id="25" creationId="{A61F0E1D-8169-22E2-6509-A37E538805EA}"/>
           </ac:cxnSpMkLst>
         </pc:cxnChg>
-        <pc:cxnChg chg="mod">
-          <ac:chgData name="Heo, JaeBin" userId="ed0301eb-46df-4c79-9b79-7e87ffe9b103" providerId="ADAL" clId="{5528FEEF-D1DC-4188-B0AA-883E55D1B0F9}" dt="2026-03-27T04:22:02.957" v="186"/>
-          <ac:cxnSpMkLst>
-            <pc:docMk/>
-            <pc:sldMk cId="4041900156" sldId="257"/>
-            <ac:cxnSpMk id="27" creationId="{5CF309E5-52B7-1862-0038-FBD03C819E1F}"/>
-          </ac:cxnSpMkLst>
-        </pc:cxnChg>
-        <pc:cxnChg chg="mod">
-          <ac:chgData name="Heo, JaeBin" userId="ed0301eb-46df-4c79-9b79-7e87ffe9b103" providerId="ADAL" clId="{5528FEEF-D1DC-4188-B0AA-883E55D1B0F9}" dt="2026-03-27T04:22:02.957" v="186"/>
-          <ac:cxnSpMkLst>
-            <pc:docMk/>
-            <pc:sldMk cId="4041900156" sldId="257"/>
-            <ac:cxnSpMk id="28" creationId="{F97F88A0-2843-5DB0-9F39-93C50B6FDB06}"/>
-          </ac:cxnSpMkLst>
-        </pc:cxnChg>
-        <pc:cxnChg chg="add mod">
-          <ac:chgData name="Heo, JaeBin" userId="ed0301eb-46df-4c79-9b79-7e87ffe9b103" providerId="ADAL" clId="{5528FEEF-D1DC-4188-B0AA-883E55D1B0F9}" dt="2026-03-27T04:22:04.290" v="187" actId="164"/>
-          <ac:cxnSpMkLst>
-            <pc:docMk/>
-            <pc:sldMk cId="4041900156" sldId="257"/>
-            <ac:cxnSpMk id="29" creationId="{6CF4855B-C377-55DF-F351-86DB2CDC1695}"/>
-          </ac:cxnSpMkLst>
-        </pc:cxnChg>
       </pc:sldChg>
       <pc:sldChg chg="addSp delSp modSp add mod">
         <pc:chgData name="Heo, JaeBin" userId="ed0301eb-46df-4c79-9b79-7e87ffe9b103" providerId="ADAL" clId="{5528FEEF-D1DC-4188-B0AA-883E55D1B0F9}" dt="2026-03-27T04:58:03.174" v="307" actId="1076"/>
@@ -543,30 +399,6 @@
             <ac:spMk id="8" creationId="{288C0FF3-3D2F-04C8-D385-0633866DEECD}"/>
           </ac:spMkLst>
         </pc:spChg>
-        <pc:grpChg chg="del">
-          <ac:chgData name="Heo, JaeBin" userId="ed0301eb-46df-4c79-9b79-7e87ffe9b103" providerId="ADAL" clId="{5528FEEF-D1DC-4188-B0AA-883E55D1B0F9}" dt="2026-03-27T04:22:26.801" v="195" actId="478"/>
-          <ac:grpSpMkLst>
-            <pc:docMk/>
-            <pc:sldMk cId="3234079510" sldId="258"/>
-            <ac:grpSpMk id="30" creationId="{45344569-14E9-6263-02E3-8C554A5536FC}"/>
-          </ac:grpSpMkLst>
-        </pc:grpChg>
-        <pc:picChg chg="add del mod">
-          <ac:chgData name="Heo, JaeBin" userId="ed0301eb-46df-4c79-9b79-7e87ffe9b103" providerId="ADAL" clId="{5528FEEF-D1DC-4188-B0AA-883E55D1B0F9}" dt="2026-03-27T04:57:39.501" v="301" actId="478"/>
-          <ac:picMkLst>
-            <pc:docMk/>
-            <pc:sldMk cId="3234079510" sldId="258"/>
-            <ac:picMk id="3" creationId="{1D860A1A-F68B-0CE9-59FB-3453CFF07370}"/>
-          </ac:picMkLst>
-        </pc:picChg>
-        <pc:picChg chg="add del">
-          <ac:chgData name="Heo, JaeBin" userId="ed0301eb-46df-4c79-9b79-7e87ffe9b103" providerId="ADAL" clId="{5528FEEF-D1DC-4188-B0AA-883E55D1B0F9}" dt="2026-03-27T04:27:02.504" v="277" actId="478"/>
-          <ac:picMkLst>
-            <pc:docMk/>
-            <pc:sldMk cId="3234079510" sldId="258"/>
-            <ac:picMk id="3" creationId="{383DBC92-8A3E-9DAE-97A3-FD6AA82A6EB7}"/>
-          </ac:picMkLst>
-        </pc:picChg>
         <pc:picChg chg="add mod modCrop">
           <ac:chgData name="Heo, JaeBin" userId="ed0301eb-46df-4c79-9b79-7e87ffe9b103" providerId="ADAL" clId="{5528FEEF-D1DC-4188-B0AA-883E55D1B0F9}" dt="2026-03-27T04:58:03.174" v="307" actId="1076"/>
           <ac:picMkLst>
@@ -575,22 +407,6 @@
             <ac:picMk id="5" creationId="{64549D93-0D41-74E6-17D3-9CD8BE31DDD5}"/>
           </ac:picMkLst>
         </pc:picChg>
-        <pc:picChg chg="del">
-          <ac:chgData name="Heo, JaeBin" userId="ed0301eb-46df-4c79-9b79-7e87ffe9b103" providerId="ADAL" clId="{5528FEEF-D1DC-4188-B0AA-883E55D1B0F9}" dt="2026-03-27T04:22:25.580" v="193" actId="478"/>
-          <ac:picMkLst>
-            <pc:docMk/>
-            <pc:sldMk cId="3234079510" sldId="258"/>
-            <ac:picMk id="9" creationId="{E44CBA7B-4FCE-7E2F-573E-5B850E057B50}"/>
-          </ac:picMkLst>
-        </pc:picChg>
-        <pc:cxnChg chg="del">
-          <ac:chgData name="Heo, JaeBin" userId="ed0301eb-46df-4c79-9b79-7e87ffe9b103" providerId="ADAL" clId="{5528FEEF-D1DC-4188-B0AA-883E55D1B0F9}" dt="2026-03-27T04:22:26.352" v="194" actId="478"/>
-          <ac:cxnSpMkLst>
-            <pc:docMk/>
-            <pc:sldMk cId="3234079510" sldId="258"/>
-            <ac:cxnSpMk id="13" creationId="{9DB127E6-DC4C-8D55-946B-073C1836844A}"/>
-          </ac:cxnSpMkLst>
-        </pc:cxnChg>
       </pc:sldChg>
     </pc:docChg>
   </pc:docChgLst>
@@ -746,7 +562,7 @@
           <a:p>
             <a:fld id="{D24386F7-11B1-451A-AEC0-86E66AF31A4E}" type="datetimeFigureOut">
               <a:rPr lang="en-US" smtClean="0"/>
-              <a:t>3/27/2026</a:t>
+              <a:t>4/8/2026</a:t>
             </a:fld>
             <a:endParaRPr lang="en-US"/>
           </a:p>
@@ -946,7 +762,7 @@
           <a:p>
             <a:fld id="{D24386F7-11B1-451A-AEC0-86E66AF31A4E}" type="datetimeFigureOut">
               <a:rPr lang="en-US" smtClean="0"/>
-              <a:t>3/27/2026</a:t>
+              <a:t>4/8/2026</a:t>
             </a:fld>
             <a:endParaRPr lang="en-US"/>
           </a:p>
@@ -1156,7 +972,7 @@
           <a:p>
             <a:fld id="{D24386F7-11B1-451A-AEC0-86E66AF31A4E}" type="datetimeFigureOut">
               <a:rPr lang="en-US" smtClean="0"/>
-              <a:t>3/27/2026</a:t>
+              <a:t>4/8/2026</a:t>
             </a:fld>
             <a:endParaRPr lang="en-US"/>
           </a:p>
@@ -1356,7 +1172,7 @@
           <a:p>
             <a:fld id="{D24386F7-11B1-451A-AEC0-86E66AF31A4E}" type="datetimeFigureOut">
               <a:rPr lang="en-US" smtClean="0"/>
-              <a:t>3/27/2026</a:t>
+              <a:t>4/8/2026</a:t>
             </a:fld>
             <a:endParaRPr lang="en-US"/>
           </a:p>
@@ -1632,7 +1448,7 @@
           <a:p>
             <a:fld id="{D24386F7-11B1-451A-AEC0-86E66AF31A4E}" type="datetimeFigureOut">
               <a:rPr lang="en-US" smtClean="0"/>
-              <a:t>3/27/2026</a:t>
+              <a:t>4/8/2026</a:t>
             </a:fld>
             <a:endParaRPr lang="en-US"/>
           </a:p>
@@ -1900,7 +1716,7 @@
           <a:p>
             <a:fld id="{D24386F7-11B1-451A-AEC0-86E66AF31A4E}" type="datetimeFigureOut">
               <a:rPr lang="en-US" smtClean="0"/>
-              <a:t>3/27/2026</a:t>
+              <a:t>4/8/2026</a:t>
             </a:fld>
             <a:endParaRPr lang="en-US"/>
           </a:p>
@@ -2315,7 +2131,7 @@
           <a:p>
             <a:fld id="{D24386F7-11B1-451A-AEC0-86E66AF31A4E}" type="datetimeFigureOut">
               <a:rPr lang="en-US" smtClean="0"/>
-              <a:t>3/27/2026</a:t>
+              <a:t>4/8/2026</a:t>
             </a:fld>
             <a:endParaRPr lang="en-US"/>
           </a:p>
@@ -2457,7 +2273,7 @@
           <a:p>
             <a:fld id="{D24386F7-11B1-451A-AEC0-86E66AF31A4E}" type="datetimeFigureOut">
               <a:rPr lang="en-US" smtClean="0"/>
-              <a:t>3/27/2026</a:t>
+              <a:t>4/8/2026</a:t>
             </a:fld>
             <a:endParaRPr lang="en-US"/>
           </a:p>
@@ -2570,7 +2386,7 @@
           <a:p>
             <a:fld id="{D24386F7-11B1-451A-AEC0-86E66AF31A4E}" type="datetimeFigureOut">
               <a:rPr lang="en-US" smtClean="0"/>
-              <a:t>3/27/2026</a:t>
+              <a:t>4/8/2026</a:t>
             </a:fld>
             <a:endParaRPr lang="en-US"/>
           </a:p>
@@ -2883,7 +2699,7 @@
           <a:p>
             <a:fld id="{D24386F7-11B1-451A-AEC0-86E66AF31A4E}" type="datetimeFigureOut">
               <a:rPr lang="en-US" smtClean="0"/>
-              <a:t>3/27/2026</a:t>
+              <a:t>4/8/2026</a:t>
             </a:fld>
             <a:endParaRPr lang="en-US"/>
           </a:p>
@@ -3172,7 +2988,7 @@
           <a:p>
             <a:fld id="{D24386F7-11B1-451A-AEC0-86E66AF31A4E}" type="datetimeFigureOut">
               <a:rPr lang="en-US" smtClean="0"/>
-              <a:t>3/27/2026</a:t>
+              <a:t>4/8/2026</a:t>
             </a:fld>
             <a:endParaRPr lang="en-US"/>
           </a:p>
@@ -3415,7 +3231,7 @@
           <a:p>
             <a:fld id="{D24386F7-11B1-451A-AEC0-86E66AF31A4E}" type="datetimeFigureOut">
               <a:rPr lang="en-US" smtClean="0"/>
-              <a:t>3/27/2026</a:t>
+              <a:t>4/8/2026</a:t>
             </a:fld>
             <a:endParaRPr lang="en-US"/>
           </a:p>
@@ -4421,36 +4237,6 @@
           </p:style>
         </p:cxnSp>
       </p:grpSp>
-      <p:pic>
-        <p:nvPicPr>
-          <p:cNvPr id="3" name="그림 2">
-            <a:extLst>
-              <a:ext uri="{FF2B5EF4-FFF2-40B4-BE49-F238E27FC236}">
-                <a16:creationId xmlns:a16="http://schemas.microsoft.com/office/drawing/2014/main" id="{427643FE-045C-131F-6C49-B91FFB3D58ED}"/>
-              </a:ext>
-            </a:extLst>
-          </p:cNvPr>
-          <p:cNvPicPr>
-            <a:picLocks noChangeAspect="1"/>
-          </p:cNvPicPr>
-          <p:nvPr/>
-        </p:nvPicPr>
-        <p:blipFill>
-          <a:blip r:embed="rId3"/>
-          <a:stretch>
-            <a:fillRect/>
-          </a:stretch>
-        </p:blipFill>
-        <p:spPr>
-          <a:xfrm>
-            <a:off x="1151360" y="507645"/>
-            <a:ext cx="9345039" cy="5842710"/>
-          </a:xfrm>
-          <a:prstGeom prst="rect">
-            <a:avLst/>
-          </a:prstGeom>
-        </p:spPr>
-      </p:pic>
     </p:spTree>
     <p:extLst>
       <p:ext uri="{BB962C8B-B14F-4D97-AF65-F5344CB8AC3E}">
@@ -5948,4 +5734,10 @@
     </a:ext>
   </a:extLst>
 </a:theme>
+</file>
+
+<file path=docMetadata/LabelInfo.xml><?xml version="1.0" encoding="utf-8"?>
+<clbl:labelList xmlns:clbl="http://schemas.microsoft.com/office/2020/mipLabelMetadata">
+  <clbl:label id="{3f3ac890-09a1-47d3-8d04-15427d7fec91}" enabled="1" method="Standard" siteId="{39b77101-99b7-41c9-8d6a-7794b9d48476}" removed="0"/>
+</clbl:labelList>
 </file>